--- a/classes/parte-6-analisis-de-malware/148-analisis-de-comportamiento/clase-148-presentacion.pptx
+++ b/classes/parte-6-analisis-de-malware/148-analisis-de-comportamiento/clase-148-presentacion.pptx
@@ -17,6 +17,9 @@
     <p:sldId id="265" r:id="rId16"/>
     <p:sldId id="266" r:id="rId17"/>
     <p:sldId id="267" r:id="rId18"/>
+    <p:sldId id="268" r:id="rId19"/>
+    <p:sldId id="269" r:id="rId20"/>
+    <p:sldId id="270" r:id="rId21"/>
   </p:sldIdLst>
   <p:sldSz cx="9144000" cy="6858000" type="screen4x3"/>
   <p:notesSz cx="6858000" cy="9144000"/>
@@ -3198,7 +3201,7 @@
                   <a:srgbClr val="0B3D2E"/>
                 </a:solidFill>
               </a:rPr>
-              <a:t>⚠️ Errores comunes</a:t>
+              <a:t>✍️ Ejercicios</a:t>
             </a:r>
           </a:p>
         </p:txBody>
@@ -3236,67 +3239,82 @@
                   <a:srgbClr val="22282E"/>
                 </a:solidFill>
               </a:rPr>
-              <a:t>•  malfind sin resultados — Inyección ya cerrada o en otro proceso; captura memoria antes</a:t>
-            </a:r>
-          </a:p>
-          <a:p>
-            <a:pPr>
-              <a:spcAft>
-                <a:spcPts val="600"/>
-              </a:spcAft>
-            </a:pPr>
-            <a:r>
-              <a:rPr sz="1500">
-                <a:solidFill>
-                  <a:srgbClr val="22282E"/>
-                </a:solidFill>
-              </a:rPr>
-              <a:t>•  Persistencia "no existe" — Solo miraste Run keys; revisa servicios, tareas y WMI</a:t>
-            </a:r>
-          </a:p>
-          <a:p>
-            <a:pPr>
-              <a:spcAft>
-                <a:spcPts val="600"/>
-              </a:spcAft>
-            </a:pPr>
-            <a:r>
-              <a:rPr sz="1500">
-                <a:solidFill>
-                  <a:srgbClr val="22282E"/>
-                </a:solidFill>
-              </a:rPr>
-              <a:t>•  Confundir técnica con IOC — El IP es IOC; "C2 over HTTPS" es la técnica ATT&amp;CK</a:t>
-            </a:r>
-          </a:p>
-          <a:p>
-            <a:pPr>
-              <a:spcAft>
-                <a:spcPts val="600"/>
-              </a:spcAft>
-            </a:pPr>
-            <a:r>
-              <a:rPr sz="1500">
-                <a:solidFill>
-                  <a:srgbClr val="22282E"/>
-                </a:solidFill>
-              </a:rPr>
-              <a:t>•  Árbol de procesos confuso — Usa pstree; correlaciona PPID con el proceso padre real</a:t>
-            </a:r>
-          </a:p>
-          <a:p>
-            <a:pPr>
-              <a:spcAft>
-                <a:spcPts val="600"/>
-              </a:spcAft>
-            </a:pPr>
-            <a:r>
-              <a:rPr sz="1500">
-                <a:solidFill>
-                  <a:srgbClr val="22282E"/>
-                </a:solidFill>
-              </a:rPr>
-              <a:t>•  IDs de ATT&amp;CK inventados — Verifica cada técnica en attack.mitre.org</a:t>
+              <a:t>•  Diferencia DLL injection, hollowing y APC injection con un ejemplo de cada uno.</a:t>
+            </a:r>
+          </a:p>
+          <a:p>
+            <a:pPr>
+              <a:spcAft>
+                <a:spcPts val="600"/>
+              </a:spcAft>
+            </a:pPr>
+            <a:r>
+              <a:rPr sz="1500">
+                <a:solidFill>
+                  <a:srgbClr val="22282E"/>
+                </a:solidFill>
+              </a:rPr>
+              <a:t>•  Mapea 6 acciones observadas a técnicas ATT&amp;CK con su ID.</a:t>
+            </a:r>
+          </a:p>
+          <a:p>
+            <a:pPr>
+              <a:spcAft>
+                <a:spcPts val="600"/>
+              </a:spcAft>
+            </a:pPr>
+            <a:r>
+              <a:rPr sz="1500">
+                <a:solidFill>
+                  <a:srgbClr val="22282E"/>
+                </a:solidFill>
+              </a:rPr>
+              <a:t>•  Explica cómo malfind detecta código inyectado.</a:t>
+            </a:r>
+          </a:p>
+          <a:p>
+            <a:pPr>
+              <a:spcAft>
+                <a:spcPts val="600"/>
+              </a:spcAft>
+            </a:pPr>
+            <a:r>
+              <a:rPr sz="1500">
+                <a:solidFill>
+                  <a:srgbClr val="22282E"/>
+                </a:solidFill>
+              </a:rPr>
+              <a:t>•  Propón una regla de detección (Sysmon/EDR) para la persistencia hallada.</a:t>
+            </a:r>
+          </a:p>
+          <a:p>
+            <a:pPr>
+              <a:spcAft>
+                <a:spcPts val="600"/>
+              </a:spcAft>
+            </a:pPr>
+            <a:r>
+              <a:rPr sz="1500">
+                <a:solidFill>
+                  <a:srgbClr val="22282E"/>
+                </a:solidFill>
+              </a:rPr>
+              <a:t>•  Correlaciona un proceso de pslist con su conexión de red.</a:t>
+            </a:r>
+          </a:p>
+          <a:p>
+            <a:pPr>
+              <a:spcAft>
+                <a:spcPts val="600"/>
+              </a:spcAft>
+            </a:pPr>
+            <a:r>
+              <a:rPr sz="1500">
+                <a:solidFill>
+                  <a:srgbClr val="22282E"/>
+                </a:solidFill>
+              </a:rPr>
+              <a:t>•  Justifica por qué los TTPs son más duraderos que los IOCs.</a:t>
             </a:r>
           </a:p>
         </p:txBody>
@@ -3347,7 +3365,7 @@
                   <a:srgbClr val="0B3D2E"/>
                 </a:solidFill>
               </a:rPr>
-              <a:t>❓ Preguntas frecuentes</a:t>
+              <a:t>📝 Reto verificable</a:t>
             </a:r>
           </a:p>
         </p:txBody>
@@ -3385,37 +3403,22 @@
                   <a:srgbClr val="22282E"/>
                 </a:solidFill>
               </a:rPr>
-              <a:t>•  ❓ ¿Por qué mapear a ATT&amp;CK? Porque estandariza el reporte, permite comparar amenazas y priorizar detecciones sobre técnicas que el atacante no puede cambiar fácilmente.</a:t>
-            </a:r>
-          </a:p>
-          <a:p>
-            <a:pPr>
-              <a:spcAft>
-                <a:spcPts val="600"/>
-              </a:spcAft>
-            </a:pPr>
-            <a:r>
-              <a:rPr sz="1500">
-                <a:solidFill>
-                  <a:srgbClr val="22282E"/>
-                </a:solidFill>
-              </a:rPr>
-              <a:t>•  ❓ ¿Memoria o disco? Ambos. El malware fileless o inyectado apenas toca disco; la memoria revela lo que el análisis estático no ve.</a:t>
-            </a:r>
-          </a:p>
-          <a:p>
-            <a:pPr>
-              <a:spcAft>
-                <a:spcPts val="600"/>
-              </a:spcAft>
-            </a:pPr>
-            <a:r>
-              <a:rPr sz="1500">
-                <a:solidFill>
-                  <a:srgbClr val="22282E"/>
-                </a:solidFill>
-              </a:rPr>
-              <a:t>•  ❓ ¿Cuántos ASEPs de persistencia existen? Decenas. Autoruns cataloga muchos; por eso no basta con revisar las Run keys.</a:t>
+              <a:t>•  Entrega una matriz de comportamiento de una muestra con al menos 8 técnicas ATT&amp;CK (con ID y evidencia), la inyección confirmada por malfind y la persistencia identificada, más una detección…</a:t>
+            </a:r>
+          </a:p>
+          <a:p>
+            <a:pPr>
+              <a:spcAft>
+                <a:spcPts val="600"/>
+              </a:spcAft>
+            </a:pPr>
+            <a:r>
+              <a:rPr sz="1500">
+                <a:solidFill>
+                  <a:srgbClr val="22282E"/>
+                </a:solidFill>
+              </a:rPr>
+              <a:t>•  Criterio de aceptación: cada técnica tiene evidencia (ProcMon/Volatility/Wireshark) y un ID Txxxx correcto, y al menos una detección propuesta es implementable con Sysmon o un EDR.</a:t>
             </a:r>
           </a:p>
         </p:txBody>
@@ -3466,7 +3469,7 @@
                   <a:srgbClr val="0B3D2E"/>
                 </a:solidFill>
               </a:rPr>
-              <a:t>🔗 Referencias</a:t>
+              <a:t>⚠️ Errores comunes</a:t>
             </a:r>
           </a:p>
         </p:txBody>
@@ -3504,6 +3507,289 @@
                   <a:srgbClr val="22282E"/>
                 </a:solidFill>
               </a:rPr>
+              <a:t>•  malfind sin resultados — Inyección ya cerrada o en otro proceso; captura memoria antes</a:t>
+            </a:r>
+          </a:p>
+          <a:p>
+            <a:pPr>
+              <a:spcAft>
+                <a:spcPts val="600"/>
+              </a:spcAft>
+            </a:pPr>
+            <a:r>
+              <a:rPr sz="1500">
+                <a:solidFill>
+                  <a:srgbClr val="22282E"/>
+                </a:solidFill>
+              </a:rPr>
+              <a:t>•  Persistencia "no existe" — Solo miraste Run keys; revisa servicios, tareas y WMI</a:t>
+            </a:r>
+          </a:p>
+          <a:p>
+            <a:pPr>
+              <a:spcAft>
+                <a:spcPts val="600"/>
+              </a:spcAft>
+            </a:pPr>
+            <a:r>
+              <a:rPr sz="1500">
+                <a:solidFill>
+                  <a:srgbClr val="22282E"/>
+                </a:solidFill>
+              </a:rPr>
+              <a:t>•  Confundir técnica con IOC — El IP es IOC; "C2 over HTTPS" es la técnica ATT&amp;CK</a:t>
+            </a:r>
+          </a:p>
+          <a:p>
+            <a:pPr>
+              <a:spcAft>
+                <a:spcPts val="600"/>
+              </a:spcAft>
+            </a:pPr>
+            <a:r>
+              <a:rPr sz="1500">
+                <a:solidFill>
+                  <a:srgbClr val="22282E"/>
+                </a:solidFill>
+              </a:rPr>
+              <a:t>•  Árbol de procesos confuso — Usa pstree; correlaciona PPID con el proceso padre real</a:t>
+            </a:r>
+          </a:p>
+          <a:p>
+            <a:pPr>
+              <a:spcAft>
+                <a:spcPts val="600"/>
+              </a:spcAft>
+            </a:pPr>
+            <a:r>
+              <a:rPr sz="1500">
+                <a:solidFill>
+                  <a:srgbClr val="22282E"/>
+                </a:solidFill>
+              </a:rPr>
+              <a:t>•  IDs de ATT&amp;CK inventados — Verifica cada técnica en attack.mitre.org</a:t>
+            </a:r>
+          </a:p>
+        </p:txBody>
+      </p:sp>
+    </p:spTree>
+  </p:cSld>
+  <p:clrMapOvr>
+    <a:masterClrMapping/>
+  </p:clrMapOvr>
+</p:sld>
+</file>
+
+<file path=ppt/slides/slide13.xml><?xml version="1.0" encoding="utf-8"?>
+<p:sld xmlns:a="http://schemas.openxmlformats.org/drawingml/2006/main" xmlns:p="http://schemas.openxmlformats.org/presentationml/2006/main" xmlns:r="http://schemas.openxmlformats.org/officeDocument/2006/relationships">
+  <p:cSld>
+    <p:spTree>
+      <p:nvGrpSpPr>
+        <p:cNvPr id="1" name=""/>
+        <p:cNvGrpSpPr/>
+        <p:nvPr/>
+      </p:nvGrpSpPr>
+      <p:grpSpPr/>
+      <p:sp>
+        <p:nvSpPr>
+          <p:cNvPr id="2" name="TextBox 1"/>
+          <p:cNvSpPr txBox="1"/>
+          <p:nvPr/>
+        </p:nvSpPr>
+        <p:spPr>
+          <a:xfrm>
+            <a:off x="457200" y="320040"/>
+            <a:ext cx="8229600" cy="822960"/>
+          </a:xfrm>
+          <a:prstGeom prst="rect">
+            <a:avLst/>
+          </a:prstGeom>
+          <a:noFill/>
+        </p:spPr>
+        <p:txBody>
+          <a:bodyPr wrap="square">
+            <a:spAutoFit/>
+          </a:bodyPr>
+          <a:lstStyle/>
+          <a:p>
+            <a:r>
+              <a:rPr sz="2600" b="1">
+                <a:solidFill>
+                  <a:srgbClr val="0B3D2E"/>
+                </a:solidFill>
+              </a:rPr>
+              <a:t>❓ Preguntas frecuentes</a:t>
+            </a:r>
+          </a:p>
+        </p:txBody>
+      </p:sp>
+      <p:sp>
+        <p:nvSpPr>
+          <p:cNvPr id="3" name="TextBox 2"/>
+          <p:cNvSpPr txBox="1"/>
+          <p:nvPr/>
+        </p:nvSpPr>
+        <p:spPr>
+          <a:xfrm>
+            <a:off x="457200" y="1280160"/>
+            <a:ext cx="8229600" cy="4937760"/>
+          </a:xfrm>
+          <a:prstGeom prst="rect">
+            <a:avLst/>
+          </a:prstGeom>
+          <a:noFill/>
+        </p:spPr>
+        <p:txBody>
+          <a:bodyPr wrap="square">
+            <a:spAutoFit/>
+          </a:bodyPr>
+          <a:lstStyle/>
+          <a:p>
+            <a:pPr>
+              <a:spcAft>
+                <a:spcPts val="600"/>
+              </a:spcAft>
+            </a:pPr>
+            <a:r>
+              <a:rPr sz="1500">
+                <a:solidFill>
+                  <a:srgbClr val="22282E"/>
+                </a:solidFill>
+              </a:rPr>
+              <a:t>•  ❓ ¿Por qué mapear a ATT&amp;CK? Porque estandariza el reporte, permite comparar amenazas y priorizar detecciones sobre técnicas que el atacante no puede cambiar fácilmente.</a:t>
+            </a:r>
+          </a:p>
+          <a:p>
+            <a:pPr>
+              <a:spcAft>
+                <a:spcPts val="600"/>
+              </a:spcAft>
+            </a:pPr>
+            <a:r>
+              <a:rPr sz="1500">
+                <a:solidFill>
+                  <a:srgbClr val="22282E"/>
+                </a:solidFill>
+              </a:rPr>
+              <a:t>•  ❓ ¿Memoria o disco? Ambos. El malware fileless o inyectado apenas toca disco; la memoria revela lo que el análisis estático no ve.</a:t>
+            </a:r>
+          </a:p>
+          <a:p>
+            <a:pPr>
+              <a:spcAft>
+                <a:spcPts val="600"/>
+              </a:spcAft>
+            </a:pPr>
+            <a:r>
+              <a:rPr sz="1500">
+                <a:solidFill>
+                  <a:srgbClr val="22282E"/>
+                </a:solidFill>
+              </a:rPr>
+              <a:t>•  ❓ ¿Cuántos ASEPs de persistencia existen? Decenas. Autoruns cataloga muchos; por eso no basta con revisar las Run keys.</a:t>
+            </a:r>
+          </a:p>
+        </p:txBody>
+      </p:sp>
+    </p:spTree>
+  </p:cSld>
+  <p:clrMapOvr>
+    <a:masterClrMapping/>
+  </p:clrMapOvr>
+</p:sld>
+</file>
+
+<file path=ppt/slides/slide14.xml><?xml version="1.0" encoding="utf-8"?>
+<p:sld xmlns:a="http://schemas.openxmlformats.org/drawingml/2006/main" xmlns:p="http://schemas.openxmlformats.org/presentationml/2006/main" xmlns:r="http://schemas.openxmlformats.org/officeDocument/2006/relationships">
+  <p:cSld>
+    <p:spTree>
+      <p:nvGrpSpPr>
+        <p:cNvPr id="1" name=""/>
+        <p:cNvGrpSpPr/>
+        <p:nvPr/>
+      </p:nvGrpSpPr>
+      <p:grpSpPr/>
+      <p:sp>
+        <p:nvSpPr>
+          <p:cNvPr id="2" name="TextBox 1"/>
+          <p:cNvSpPr txBox="1"/>
+          <p:nvPr/>
+        </p:nvSpPr>
+        <p:spPr>
+          <a:xfrm>
+            <a:off x="457200" y="320040"/>
+            <a:ext cx="8229600" cy="822960"/>
+          </a:xfrm>
+          <a:prstGeom prst="rect">
+            <a:avLst/>
+          </a:prstGeom>
+          <a:noFill/>
+        </p:spPr>
+        <p:txBody>
+          <a:bodyPr wrap="square">
+            <a:spAutoFit/>
+          </a:bodyPr>
+          <a:lstStyle/>
+          <a:p>
+            <a:r>
+              <a:rPr sz="2600" b="1">
+                <a:solidFill>
+                  <a:srgbClr val="0B3D2E"/>
+                </a:solidFill>
+              </a:rPr>
+              <a:t>🔗 Referencias</a:t>
+            </a:r>
+          </a:p>
+        </p:txBody>
+      </p:sp>
+      <p:sp>
+        <p:nvSpPr>
+          <p:cNvPr id="3" name="TextBox 2"/>
+          <p:cNvSpPr txBox="1"/>
+          <p:nvPr/>
+        </p:nvSpPr>
+        <p:spPr>
+          <a:xfrm>
+            <a:off x="457200" y="1280160"/>
+            <a:ext cx="8229600" cy="4937760"/>
+          </a:xfrm>
+          <a:prstGeom prst="rect">
+            <a:avLst/>
+          </a:prstGeom>
+          <a:noFill/>
+        </p:spPr>
+        <p:txBody>
+          <a:bodyPr wrap="square">
+            <a:spAutoFit/>
+          </a:bodyPr>
+          <a:lstStyle/>
+          <a:p>
+            <a:pPr>
+              <a:spcAft>
+                <a:spcPts val="600"/>
+              </a:spcAft>
+            </a:pPr>
+            <a:r>
+              <a:rPr sz="1500">
+                <a:solidFill>
+                  <a:srgbClr val="22282E"/>
+                </a:solidFill>
+              </a:rPr>
+              <a:t>•  🛠️ RootCause Windows Inspector (Apache-2.0) — sensor forense de comportamiento para Windows · lab: labs/rootcause-windows.</a:t>
+            </a:r>
+          </a:p>
+          <a:p>
+            <a:pPr>
+              <a:spcAft>
+                <a:spcPts val="600"/>
+              </a:spcAft>
+            </a:pPr>
+            <a:r>
+              <a:rPr sz="1500">
+                <a:solidFill>
+                  <a:srgbClr val="22282E"/>
+                </a:solidFill>
+              </a:rPr>
               <a:t>•  Monnappa K. A., Learning Malware Analysis, cap. 7–8.</a:t>
             </a:r>
           </a:p>
@@ -3554,6 +3840,81 @@
           </a:p>
         </p:txBody>
       </p:sp>
+    </p:spTree>
+  </p:cSld>
+  <p:clrMapOvr>
+    <a:masterClrMapping/>
+  </p:clrMapOvr>
+</p:sld>
+</file>
+
+<file path=ppt/slides/slide15.xml><?xml version="1.0" encoding="utf-8"?>
+<p:sld xmlns:a="http://schemas.openxmlformats.org/drawingml/2006/main" xmlns:p="http://schemas.openxmlformats.org/presentationml/2006/main" xmlns:r="http://schemas.openxmlformats.org/officeDocument/2006/relationships">
+  <p:cSld>
+    <p:spTree>
+      <p:nvGrpSpPr>
+        <p:cNvPr id="1" name=""/>
+        <p:cNvGrpSpPr/>
+        <p:nvPr/>
+      </p:nvGrpSpPr>
+      <p:grpSpPr/>
+      <p:sp>
+        <p:nvSpPr>
+          <p:cNvPr id="2" name="TextBox 1"/>
+          <p:cNvSpPr txBox="1"/>
+          <p:nvPr/>
+        </p:nvSpPr>
+        <p:spPr>
+          <a:xfrm>
+            <a:off x="457200" y="274320"/>
+            <a:ext cx="8229600" cy="640080"/>
+          </a:xfrm>
+          <a:prstGeom prst="rect">
+            <a:avLst/>
+          </a:prstGeom>
+          <a:noFill/>
+        </p:spPr>
+        <p:txBody>
+          <a:bodyPr wrap="square">
+            <a:spAutoFit/>
+          </a:bodyPr>
+          <a:lstStyle/>
+          <a:p>
+            <a:r>
+              <a:rPr sz="2200" b="1">
+                <a:solidFill>
+                  <a:srgbClr val="0B3D2E"/>
+                </a:solidFill>
+              </a:rPr>
+              <a:t>Diagrama de la clase</a:t>
+            </a:r>
+          </a:p>
+        </p:txBody>
+      </p:sp>
+      <p:pic>
+        <p:nvPicPr>
+          <p:cNvPr id="3" name="Picture 2" descr="d69cab20223cdd57.png"/>
+          <p:cNvPicPr>
+            <a:picLocks noChangeAspect="1"/>
+          </p:cNvPicPr>
+          <p:nvPr/>
+        </p:nvPicPr>
+        <p:blipFill>
+          <a:blip r:embed="rId2"/>
+          <a:stretch>
+            <a:fillRect/>
+          </a:stretch>
+        </p:blipFill>
+        <p:spPr>
+          <a:xfrm>
+            <a:off x="2566260" y="1097280"/>
+            <a:ext cx="4011479" cy="5303520"/>
+          </a:xfrm>
+          <a:prstGeom prst="rect">
+            <a:avLst/>
+          </a:prstGeom>
+        </p:spPr>
+      </p:pic>
     </p:spTree>
   </p:cSld>
   <p:clrMapOvr>
@@ -3638,7 +3999,7 @@
                   <a:srgbClr val="22282E"/>
                 </a:solidFill>
               </a:rPr>
-              <a:t>•  Reconstruir el comportamiento completo de una muestra y mapearlo a MITRE ATT&amp;CK: persistencia, escalada, evasión de defensas, inyección de código, movimiento y exfiltración. Se integran análisis dinámico, forense de memoria y desensamblado para pasar de "hace cosas" a un relato estructurado de TTPs que alimenta detección y respuesta.</a:t>
+              <a:t>•  Reconstruir el comportamiento completo de una muestra y mapearlo a MITRE ATT&amp;CK: persistencia, escalada, evasión de defensas, inyección de código, movimiento y exfiltración. Se integran análisis…</a:t>
             </a:r>
           </a:p>
         </p:txBody>
@@ -4032,7 +4393,7 @@
                   <a:srgbClr val="0B3D2E"/>
                 </a:solidFill>
               </a:rPr>
-              <a:t>📖 Definiciones y características</a:t>
+              <a:t>🧠 Explicación en profundidad</a:t>
             </a:r>
           </a:p>
         </p:txBody>
@@ -4070,67 +4431,97 @@
                   <a:srgbClr val="22282E"/>
                 </a:solidFill>
               </a:rPr>
-              <a:t>•  Persistencia: mecanismo para sobrevivir reinicios. Característica clave: múltiples ASEPs posibles.</a:t>
-            </a:r>
-          </a:p>
-          <a:p>
-            <a:pPr>
-              <a:spcAft>
-                <a:spcPts val="600"/>
-              </a:spcAft>
-            </a:pPr>
-            <a:r>
-              <a:rPr sz="1500">
-                <a:solidFill>
-                  <a:srgbClr val="22282E"/>
-                </a:solidFill>
-              </a:rPr>
-              <a:t>•  Process injection: ejecutar código en otro proceso. Característica clave: evasión y camuflaje.</a:t>
-            </a:r>
-          </a:p>
-          <a:p>
-            <a:pPr>
-              <a:spcAft>
-                <a:spcPts val="600"/>
-              </a:spcAft>
-            </a:pPr>
-            <a:r>
-              <a:rPr sz="1500">
-                <a:solidFill>
-                  <a:srgbClr val="22282E"/>
-                </a:solidFill>
-              </a:rPr>
-              <a:t>•  Process hollowing: vaciar un proceso legítimo y sustituir su imagen. Característica clave: suplantación.</a:t>
-            </a:r>
-          </a:p>
-          <a:p>
-            <a:pPr>
-              <a:spcAft>
-                <a:spcPts val="600"/>
-              </a:spcAft>
-            </a:pPr>
-            <a:r>
-              <a:rPr sz="1500">
-                <a:solidFill>
-                  <a:srgbClr val="22282E"/>
-                </a:solidFill>
-              </a:rPr>
-              <a:t>•  DLL injection / APC injection: cargar código vía DLL o colas APC. Característica clave: ejecución remota en un proceso.</a:t>
-            </a:r>
-          </a:p>
-          <a:p>
-            <a:pPr>
-              <a:spcAft>
-                <a:spcPts val="600"/>
-              </a:spcAft>
-            </a:pPr>
-            <a:r>
-              <a:rPr sz="1500">
-                <a:solidFill>
-                  <a:srgbClr val="22282E"/>
-                </a:solidFill>
-              </a:rPr>
-              <a:t>•  TTP: táctica, técnica y procedimiento. Característica clave: abstracción estable frente a IOCs volátiles.</a:t>
+              <a:t>•  El análisis de comportamiento integra las observaciones dinámicas (clase 144) y estáticas en una</a:t>
+            </a:r>
+          </a:p>
+          <a:p>
+            <a:pPr>
+              <a:spcAft>
+                <a:spcPts val="600"/>
+              </a:spcAft>
+            </a:pPr>
+            <a:r>
+              <a:rPr sz="1500">
+                <a:solidFill>
+                  <a:srgbClr val="22282E"/>
+                </a:solidFill>
+              </a:rPr>
+              <a:t>•  comprensión del malware como un sistema con un ciclo de vida: cómo llega, cómo se afianza, qué hace</a:t>
+            </a:r>
+          </a:p>
+          <a:p>
+            <a:pPr>
+              <a:spcAft>
+                <a:spcPts val="600"/>
+              </a:spcAft>
+            </a:pPr>
+            <a:r>
+              <a:rPr sz="1500">
+                <a:solidFill>
+                  <a:srgbClr val="22282E"/>
+                </a:solidFill>
+              </a:rPr>
+              <a:t>•  para lograr su objetivo, y cómo evade la detección. En lugar de una lista de acciones aisladas ("crea</a:t>
+            </a:r>
+          </a:p>
+          <a:p>
+            <a:pPr>
+              <a:spcAft>
+                <a:spcPts val="600"/>
+              </a:spcAft>
+            </a:pPr>
+            <a:r>
+              <a:rPr sz="1500">
+                <a:solidFill>
+                  <a:srgbClr val="22282E"/>
+                </a:solidFill>
+              </a:rPr>
+              <a:t>•  este fichero, toca esta clave"), se construye una matriz de comportamiento que mapea cada acción a</a:t>
+            </a:r>
+          </a:p>
+          <a:p>
+            <a:pPr>
+              <a:spcAft>
+                <a:spcPts val="600"/>
+              </a:spcAft>
+            </a:pPr>
+            <a:r>
+              <a:rPr sz="1500">
+                <a:solidFill>
+                  <a:srgbClr val="22282E"/>
+                </a:solidFill>
+              </a:rPr>
+              <a:t>•  una táctica y técnica de MITRE ATT&amp;CK, lo que convierte el análisis en algo comparable con otras</a:t>
+            </a:r>
+          </a:p>
+          <a:p>
+            <a:pPr>
+              <a:spcAft>
+                <a:spcPts val="600"/>
+              </a:spcAft>
+            </a:pPr>
+            <a:r>
+              <a:rPr sz="1500">
+                <a:solidFill>
+                  <a:srgbClr val="22282E"/>
+                </a:solidFill>
+              </a:rPr>
+              <a:t>•  muestras y accionable para la defensa. El ciclo de vida típico —ejecución inicial, establecimiento de</a:t>
+            </a:r>
+          </a:p>
+          <a:p>
+            <a:pPr>
+              <a:spcAft>
+                <a:spcPts val="600"/>
+              </a:spcAft>
+            </a:pPr>
+            <a:r>
+              <a:rPr sz="1500">
+                <a:solidFill>
+                  <a:srgbClr val="22282E"/>
+                </a:solidFill>
+              </a:rPr>
+              <a:t>•  persistencia, elevación de privilegios, evasión, acción sobre el objetivo, comunicación con C2— da el</a:t>
             </a:r>
           </a:p>
         </p:txBody>
@@ -4181,7 +4572,7 @@
                   <a:srgbClr val="0B3D2E"/>
                 </a:solidFill>
               </a:rPr>
-              <a:t>🧰 Herramientas y preparación</a:t>
+              <a:t>📖 Definiciones y características</a:t>
             </a:r>
           </a:p>
         </p:txBody>
@@ -4219,52 +4610,67 @@
                   <a:srgbClr val="22282E"/>
                 </a:solidFill>
               </a:rPr>
-              <a:t>•  ProcMon, Process Hacker, Autoruns (persistencia y actividad).</a:t>
-            </a:r>
-          </a:p>
-          <a:p>
-            <a:pPr>
-              <a:spcAft>
-                <a:spcPts val="600"/>
-              </a:spcAft>
-            </a:pPr>
-            <a:r>
-              <a:rPr sz="1500">
-                <a:solidFill>
-                  <a:srgbClr val="22282E"/>
-                </a:solidFill>
-              </a:rPr>
-              <a:t>•  Volatility 3 para análisis de memoria (pslist, malfind, dlllist, handles).</a:t>
-            </a:r>
-          </a:p>
-          <a:p>
-            <a:pPr>
-              <a:spcAft>
-                <a:spcPts val="600"/>
-              </a:spcAft>
-            </a:pPr>
-            <a:r>
-              <a:rPr sz="1500">
-                <a:solidFill>
-                  <a:srgbClr val="22282E"/>
-                </a:solidFill>
-              </a:rPr>
-              <a:t>•  Ghidra/x64dbg para confirmar la técnica en el código.</a:t>
-            </a:r>
-          </a:p>
-          <a:p>
-            <a:pPr>
-              <a:spcAft>
-                <a:spcPts val="600"/>
-              </a:spcAft>
-            </a:pPr>
-            <a:r>
-              <a:rPr sz="1500">
-                <a:solidFill>
-                  <a:srgbClr val="22282E"/>
-                </a:solidFill>
-              </a:rPr>
-              <a:t>•  Matriz MITRE ATT&amp;CK abierta como referencia.</a:t>
+              <a:t>•  Persistencia: mecanismo para sobrevivir reinicios. Característica clave: múltiples ASEPs posibles.</a:t>
+            </a:r>
+          </a:p>
+          <a:p>
+            <a:pPr>
+              <a:spcAft>
+                <a:spcPts val="600"/>
+              </a:spcAft>
+            </a:pPr>
+            <a:r>
+              <a:rPr sz="1500">
+                <a:solidFill>
+                  <a:srgbClr val="22282E"/>
+                </a:solidFill>
+              </a:rPr>
+              <a:t>•  Process injection: ejecutar código en otro proceso. Característica clave: evasión y camuflaje.</a:t>
+            </a:r>
+          </a:p>
+          <a:p>
+            <a:pPr>
+              <a:spcAft>
+                <a:spcPts val="600"/>
+              </a:spcAft>
+            </a:pPr>
+            <a:r>
+              <a:rPr sz="1500">
+                <a:solidFill>
+                  <a:srgbClr val="22282E"/>
+                </a:solidFill>
+              </a:rPr>
+              <a:t>•  Process hollowing: vaciar un proceso legítimo y sustituir su imagen. Característica clave: suplantación.</a:t>
+            </a:r>
+          </a:p>
+          <a:p>
+            <a:pPr>
+              <a:spcAft>
+                <a:spcPts val="600"/>
+              </a:spcAft>
+            </a:pPr>
+            <a:r>
+              <a:rPr sz="1500">
+                <a:solidFill>
+                  <a:srgbClr val="22282E"/>
+                </a:solidFill>
+              </a:rPr>
+              <a:t>•  DLL injection / APC injection: cargar código vía DLL o colas APC. Característica clave: ejecución remota en un proceso.</a:t>
+            </a:r>
+          </a:p>
+          <a:p>
+            <a:pPr>
+              <a:spcAft>
+                <a:spcPts val="600"/>
+              </a:spcAft>
+            </a:pPr>
+            <a:r>
+              <a:rPr sz="1500">
+                <a:solidFill>
+                  <a:srgbClr val="22282E"/>
+                </a:solidFill>
+              </a:rPr>
+              <a:t>•  TTP: táctica, técnica y procedimiento. Característica clave: abstracción estable frente a IOCs volátiles.</a:t>
             </a:r>
           </a:p>
         </p:txBody>
@@ -4315,7 +4721,7 @@
                   <a:srgbClr val="0B3D2E"/>
                 </a:solidFill>
               </a:rPr>
-              <a:t>🧪 Laboratorio guiado</a:t>
+              <a:t>📔 Glosario</a:t>
             </a:r>
           </a:p>
         </p:txBody>
@@ -4353,97 +4759,97 @@
                   <a:srgbClr val="22282E"/>
                 </a:solidFill>
               </a:rPr>
-              <a:t>•  Restaura base-clean e instrumenta la VM (ProcMon, Process Hacker, Wireshark, INetSim).</a:t>
-            </a:r>
-          </a:p>
-          <a:p>
-            <a:pPr>
-              <a:spcAft>
-                <a:spcPts val="600"/>
-              </a:spcAft>
-            </a:pPr>
-            <a:r>
-              <a:rPr sz="1500">
-                <a:solidFill>
-                  <a:srgbClr val="22282E"/>
-                </a:solidFill>
-              </a:rPr>
-              <a:t>•  Detona la muestra y captura un volcado de memoria (snapshot de RAM del hypervisor o winpmem).</a:t>
-            </a:r>
-          </a:p>
-          <a:p>
-            <a:pPr>
-              <a:spcAft>
-                <a:spcPts val="600"/>
-              </a:spcAft>
-            </a:pPr>
-            <a:r>
-              <a:rPr sz="1500">
-                <a:solidFill>
-                  <a:srgbClr val="22282E"/>
-                </a:solidFill>
-              </a:rPr>
-              <a:t>•  Con Volatility 3: windows.pslist y windows.pstree para el árbol de procesos; localiza procesos hijos anómalos.</a:t>
-            </a:r>
-          </a:p>
-          <a:p>
-            <a:pPr>
-              <a:spcAft>
-                <a:spcPts val="600"/>
-              </a:spcAft>
-            </a:pPr>
-            <a:r>
-              <a:rPr sz="1500">
-                <a:solidFill>
-                  <a:srgbClr val="22282E"/>
-                </a:solidFill>
-              </a:rPr>
-              <a:t>•  Ejecuta windows.malfind para hallar regiones de memoria RWX inyectadas y procesos "huecos" (hollowing). Anota PIDs.</a:t>
-            </a:r>
-          </a:p>
-          <a:p>
-            <a:pPr>
-              <a:spcAft>
-                <a:spcPts val="600"/>
-              </a:spcAft>
-            </a:pPr>
-            <a:r>
-              <a:rPr sz="1500">
-                <a:solidFill>
-                  <a:srgbClr val="22282E"/>
-                </a:solidFill>
-              </a:rPr>
-              <a:t>•  Con windows.dlllist y windows.handles, identifica DLLs inyectadas y el mutex de infección.</a:t>
-            </a:r>
-          </a:p>
-          <a:p>
-            <a:pPr>
-              <a:spcAft>
-                <a:spcPts val="600"/>
-              </a:spcAft>
-            </a:pPr>
-            <a:r>
-              <a:rPr sz="1500">
-                <a:solidFill>
-                  <a:srgbClr val="22282E"/>
-                </a:solidFill>
-              </a:rPr>
-              <a:t>•  Localiza la persistencia: Autoruns en vivo + RegSetValue en ProcMon. Clasifícala (Run key, servicio, tarea, WMI).</a:t>
-            </a:r>
-          </a:p>
-          <a:p>
-            <a:pPr>
-              <a:spcAft>
-                <a:spcPts val="600"/>
-              </a:spcAft>
-            </a:pPr>
-            <a:r>
-              <a:rPr sz="1500">
-                <a:solidFill>
-                  <a:srgbClr val="22282E"/>
-                </a:solidFill>
-              </a:rPr>
-              <a:t>•  Para cada acción, asigna la técnica ATT&amp;CK correspondiente (p. ej. T1055 Process Injection, T1547.001 Registry Run Keys, T1053.005 Scheduled Task).</a:t>
+              <a:t>•  Término — Definición concisa</a:t>
+            </a:r>
+          </a:p>
+          <a:p>
+            <a:pPr>
+              <a:spcAft>
+                <a:spcPts val="600"/>
+              </a:spcAft>
+            </a:pPr>
+            <a:r>
+              <a:rPr sz="1500">
+                <a:solidFill>
+                  <a:srgbClr val="22282E"/>
+                </a:solidFill>
+              </a:rPr>
+              <a:t>•  Análisis de comportamiento — Entender el malware como sistema con ciclo de vida</a:t>
+            </a:r>
+          </a:p>
+          <a:p>
+            <a:pPr>
+              <a:spcAft>
+                <a:spcPts val="600"/>
+              </a:spcAft>
+            </a:pPr>
+            <a:r>
+              <a:rPr sz="1500">
+                <a:solidFill>
+                  <a:srgbClr val="22282E"/>
+                </a:solidFill>
+              </a:rPr>
+              <a:t>•  Ciclo de vida — Ejecución, persistencia, evasión, objetivo, C2</a:t>
+            </a:r>
+          </a:p>
+          <a:p>
+            <a:pPr>
+              <a:spcAft>
+                <a:spcPts val="600"/>
+              </a:spcAft>
+            </a:pPr>
+            <a:r>
+              <a:rPr sz="1500">
+                <a:solidFill>
+                  <a:srgbClr val="22282E"/>
+                </a:solidFill>
+              </a:rPr>
+              <a:t>•  Matriz de comportamiento — Acciones mapeadas a tácticas y técnicas ATT&amp;CK</a:t>
+            </a:r>
+          </a:p>
+          <a:p>
+            <a:pPr>
+              <a:spcAft>
+                <a:spcPts val="600"/>
+              </a:spcAft>
+            </a:pPr>
+            <a:r>
+              <a:rPr sz="1500">
+                <a:solidFill>
+                  <a:srgbClr val="22282E"/>
+                </a:solidFill>
+              </a:rPr>
+              <a:t>•  Persistencia — Mecanismo para sobrevivir al reinicio</a:t>
+            </a:r>
+          </a:p>
+          <a:p>
+            <a:pPr>
+              <a:spcAft>
+                <a:spcPts val="600"/>
+              </a:spcAft>
+            </a:pPr>
+            <a:r>
+              <a:rPr sz="1500">
+                <a:solidFill>
+                  <a:srgbClr val="22282E"/>
+                </a:solidFill>
+              </a:rPr>
+              <a:t>•  Run keys / servicios / tareas / WMI — Vectores de persistencia</a:t>
+            </a:r>
+          </a:p>
+          <a:p>
+            <a:pPr>
+              <a:spcAft>
+                <a:spcPts val="600"/>
+              </a:spcAft>
+            </a:pPr>
+            <a:r>
+              <a:rPr sz="1500">
+                <a:solidFill>
+                  <a:srgbClr val="22282E"/>
+                </a:solidFill>
+              </a:rPr>
+              <a:t>•  Inyección de código — Ejecutar dentro de un proceso legítimo</a:t>
             </a:r>
           </a:p>
         </p:txBody>
@@ -4494,7 +4900,7 @@
                   <a:srgbClr val="0B3D2E"/>
                 </a:solidFill>
               </a:rPr>
-              <a:t>✍️ Ejercicios</a:t>
+              <a:t>🧰 Herramientas y preparación</a:t>
             </a:r>
           </a:p>
         </p:txBody>
@@ -4532,82 +4938,52 @@
                   <a:srgbClr val="22282E"/>
                 </a:solidFill>
               </a:rPr>
-              <a:t>•  Diferencia DLL injection, hollowing y APC injection con un ejemplo de cada uno.</a:t>
-            </a:r>
-          </a:p>
-          <a:p>
-            <a:pPr>
-              <a:spcAft>
-                <a:spcPts val="600"/>
-              </a:spcAft>
-            </a:pPr>
-            <a:r>
-              <a:rPr sz="1500">
-                <a:solidFill>
-                  <a:srgbClr val="22282E"/>
-                </a:solidFill>
-              </a:rPr>
-              <a:t>•  Mapea 6 acciones observadas a técnicas ATT&amp;CK con su ID.</a:t>
-            </a:r>
-          </a:p>
-          <a:p>
-            <a:pPr>
-              <a:spcAft>
-                <a:spcPts val="600"/>
-              </a:spcAft>
-            </a:pPr>
-            <a:r>
-              <a:rPr sz="1500">
-                <a:solidFill>
-                  <a:srgbClr val="22282E"/>
-                </a:solidFill>
-              </a:rPr>
-              <a:t>•  Explica cómo malfind detecta código inyectado.</a:t>
-            </a:r>
-          </a:p>
-          <a:p>
-            <a:pPr>
-              <a:spcAft>
-                <a:spcPts val="600"/>
-              </a:spcAft>
-            </a:pPr>
-            <a:r>
-              <a:rPr sz="1500">
-                <a:solidFill>
-                  <a:srgbClr val="22282E"/>
-                </a:solidFill>
-              </a:rPr>
-              <a:t>•  Propón una regla de detección (Sysmon/EDR) para la persistencia hallada.</a:t>
-            </a:r>
-          </a:p>
-          <a:p>
-            <a:pPr>
-              <a:spcAft>
-                <a:spcPts val="600"/>
-              </a:spcAft>
-            </a:pPr>
-            <a:r>
-              <a:rPr sz="1500">
-                <a:solidFill>
-                  <a:srgbClr val="22282E"/>
-                </a:solidFill>
-              </a:rPr>
-              <a:t>•  Correlaciona un proceso de pslist con su conexión de red.</a:t>
-            </a:r>
-          </a:p>
-          <a:p>
-            <a:pPr>
-              <a:spcAft>
-                <a:spcPts val="600"/>
-              </a:spcAft>
-            </a:pPr>
-            <a:r>
-              <a:rPr sz="1500">
-                <a:solidFill>
-                  <a:srgbClr val="22282E"/>
-                </a:solidFill>
-              </a:rPr>
-              <a:t>•  Justifica por qué los TTPs son más duraderos que los IOCs.</a:t>
+              <a:t>•  ProcMon, Process Hacker, Autoruns (persistencia y actividad).</a:t>
+            </a:r>
+          </a:p>
+          <a:p>
+            <a:pPr>
+              <a:spcAft>
+                <a:spcPts val="600"/>
+              </a:spcAft>
+            </a:pPr>
+            <a:r>
+              <a:rPr sz="1500">
+                <a:solidFill>
+                  <a:srgbClr val="22282E"/>
+                </a:solidFill>
+              </a:rPr>
+              <a:t>•  Volatility 3 para análisis de memoria (pslist, malfind, dlllist, handles).</a:t>
+            </a:r>
+          </a:p>
+          <a:p>
+            <a:pPr>
+              <a:spcAft>
+                <a:spcPts val="600"/>
+              </a:spcAft>
+            </a:pPr>
+            <a:r>
+              <a:rPr sz="1500">
+                <a:solidFill>
+                  <a:srgbClr val="22282E"/>
+                </a:solidFill>
+              </a:rPr>
+              <a:t>•  Ghidra/x64dbg para confirmar la técnica en el código.</a:t>
+            </a:r>
+          </a:p>
+          <a:p>
+            <a:pPr>
+              <a:spcAft>
+                <a:spcPts val="600"/>
+              </a:spcAft>
+            </a:pPr>
+            <a:r>
+              <a:rPr sz="1500">
+                <a:solidFill>
+                  <a:srgbClr val="22282E"/>
+                </a:solidFill>
+              </a:rPr>
+              <a:t>•  Matriz MITRE ATT&amp;CK abierta como referencia.</a:t>
             </a:r>
           </a:p>
         </p:txBody>
@@ -4658,7 +5034,7 @@
                   <a:srgbClr val="0B3D2E"/>
                 </a:solidFill>
               </a:rPr>
-              <a:t>📝 Reto verificable</a:t>
+              <a:t>🧪 Laboratorio guiado</a:t>
             </a:r>
           </a:p>
         </p:txBody>
@@ -4696,22 +5072,97 @@
                   <a:srgbClr val="22282E"/>
                 </a:solidFill>
               </a:rPr>
-              <a:t>•  Entrega una matriz de comportamiento de una muestra con al menos 8 técnicas ATT&amp;CK (con ID y evidencia), la inyección confirmada por malfind y la persistencia identificada, más una detección propuesta por técnica.</a:t>
-            </a:r>
-          </a:p>
-          <a:p>
-            <a:pPr>
-              <a:spcAft>
-                <a:spcPts val="600"/>
-              </a:spcAft>
-            </a:pPr>
-            <a:r>
-              <a:rPr sz="1500">
-                <a:solidFill>
-                  <a:srgbClr val="22282E"/>
-                </a:solidFill>
-              </a:rPr>
-              <a:t>•  Criterio de aceptación: cada técnica tiene evidencia (ProcMon/Volatility/Wireshark) y un ID Txxxx correcto, y al menos una detección propuesta es implementable con Sysmon o un EDR.</a:t>
+              <a:t>•  Restaura base-clean e instrumenta la VM (ProcMon, Process Hacker, Wireshark, INetSim).</a:t>
+            </a:r>
+          </a:p>
+          <a:p>
+            <a:pPr>
+              <a:spcAft>
+                <a:spcPts val="600"/>
+              </a:spcAft>
+            </a:pPr>
+            <a:r>
+              <a:rPr sz="1500">
+                <a:solidFill>
+                  <a:srgbClr val="22282E"/>
+                </a:solidFill>
+              </a:rPr>
+              <a:t>•  Detona la muestra y captura un volcado de memoria (snapshot de RAM del hypervisor o winpmem).</a:t>
+            </a:r>
+          </a:p>
+          <a:p>
+            <a:pPr>
+              <a:spcAft>
+                <a:spcPts val="600"/>
+              </a:spcAft>
+            </a:pPr>
+            <a:r>
+              <a:rPr sz="1500">
+                <a:solidFill>
+                  <a:srgbClr val="22282E"/>
+                </a:solidFill>
+              </a:rPr>
+              <a:t>•  Con Volatility 3: windows.pslist y windows.pstree para el árbol de procesos; localiza procesos hijos anómalos.</a:t>
+            </a:r>
+          </a:p>
+          <a:p>
+            <a:pPr>
+              <a:spcAft>
+                <a:spcPts val="600"/>
+              </a:spcAft>
+            </a:pPr>
+            <a:r>
+              <a:rPr sz="1500">
+                <a:solidFill>
+                  <a:srgbClr val="22282E"/>
+                </a:solidFill>
+              </a:rPr>
+              <a:t>•  Ejecuta windows.malfind para hallar regiones de memoria RWX inyectadas y procesos "huecos" (hollowing). Anota PIDs.</a:t>
+            </a:r>
+          </a:p>
+          <a:p>
+            <a:pPr>
+              <a:spcAft>
+                <a:spcPts val="600"/>
+              </a:spcAft>
+            </a:pPr>
+            <a:r>
+              <a:rPr sz="1500">
+                <a:solidFill>
+                  <a:srgbClr val="22282E"/>
+                </a:solidFill>
+              </a:rPr>
+              <a:t>•  Con windows.dlllist y windows.handles, identifica DLLs inyectadas y el mutex de infección.</a:t>
+            </a:r>
+          </a:p>
+          <a:p>
+            <a:pPr>
+              <a:spcAft>
+                <a:spcPts val="600"/>
+              </a:spcAft>
+            </a:pPr>
+            <a:r>
+              <a:rPr sz="1500">
+                <a:solidFill>
+                  <a:srgbClr val="22282E"/>
+                </a:solidFill>
+              </a:rPr>
+              <a:t>•  Localiza la persistencia: Autoruns en vivo + RegSetValue en ProcMon. Clasifícala (Run key, servicio, tarea, WMI).</a:t>
+            </a:r>
+          </a:p>
+          <a:p>
+            <a:pPr>
+              <a:spcAft>
+                <a:spcPts val="600"/>
+              </a:spcAft>
+            </a:pPr>
+            <a:r>
+              <a:rPr sz="1500">
+                <a:solidFill>
+                  <a:srgbClr val="22282E"/>
+                </a:solidFill>
+              </a:rPr>
+              <a:t>•  Para cada acción, asigna la técnica ATT&amp;CK correspondiente (p. ej. T1055 Process Injection, T1547.001 Registry Run Keys, T1053.005 Scheduled Task).</a:t>
             </a:r>
           </a:p>
         </p:txBody>
